--- a/templates/due_refactored.pptx
+++ b/templates/due_refactored.pptx
@@ -308,7 +308,7 @@
           <a:p>
             <a:r>
               <a:rPr dirty="0"/>
-              <a:t xml:space="preserve">CÍM DIA – </a:t>
+              <a:t>CÍM DIA – </a:t>
             </a:r>
             <a:r>
               <a:rPr dirty="0" err="1"/>
@@ -316,7 +316,7 @@
             </a:r>
             <a:r>
               <a:rPr dirty="0"/>
-              <a:t xml:space="preserve"> </a:t>
+              <a:t> </a:t>
             </a:r>
             <a:r>
               <a:rPr dirty="0" err="1"/>
@@ -337,7 +337,7 @@
             </a:r>
             <a:r>
               <a:rPr dirty="0"/>
-              <a:t xml:space="preserve">  : </a:t>
+              <a:t>  : </a:t>
             </a:r>
             <a:r>
               <a:rPr dirty="0" err="1"/>
@@ -345,7 +345,7 @@
             </a:r>
             <a:r>
               <a:rPr dirty="0"/>
-              <a:t xml:space="preserve"> (max. 2–3 </a:t>
+              <a:t> (max. 2–3 </a:t>
             </a:r>
             <a:r>
               <a:rPr dirty="0" err="1"/>
@@ -353,7 +353,7 @@
             </a:r>
             <a:r>
               <a:rPr dirty="0"/>
-              <a:t xml:space="preserve">, Garamond 34pt </a:t>
+              <a:t>, Garamond 34pt </a:t>
             </a:r>
             <a:r>
               <a:rPr dirty="0" err="1"/>
@@ -371,7 +371,7 @@
             </a:r>
             <a:r>
               <a:rPr dirty="0"/>
-              <a:t xml:space="preserve">    : </a:t>
+              <a:t>    : </a:t>
             </a:r>
             <a:r>
               <a:rPr dirty="0" err="1"/>
@@ -379,7 +379,7 @@
             </a:r>
             <a:r>
               <a:rPr dirty="0"/>
-              <a:t xml:space="preserve"> / </a:t>
+              <a:t> / </a:t>
             </a:r>
             <a:r>
               <a:rPr dirty="0" err="1"/>
@@ -387,7 +387,7 @@
             </a:r>
             <a:r>
               <a:rPr dirty="0"/>
-              <a:t xml:space="preserve"> (</a:t>
+              <a:t> (</a:t>
             </a:r>
             <a:r>
               <a:rPr lang="hu-HU" dirty="0" err="1"/>
@@ -395,7 +395,7 @@
             </a:r>
             <a:r>
               <a:rPr dirty="0"/>
-              <a:t xml:space="preserve"> 15pt, </a:t>
+              <a:t> 15pt, </a:t>
             </a:r>
             <a:r>
               <a:rPr dirty="0" err="1"/>
@@ -403,7 +403,7 @@
             </a:r>
             <a:r>
               <a:rPr dirty="0"/>
-              <a:t xml:space="preserve">, </a:t>
+              <a:t>, </a:t>
             </a:r>
             <a:r>
               <a:rPr dirty="0" err="1"/>
@@ -421,7 +421,7 @@
             </a:r>
             <a:r>
               <a:rPr dirty="0"/>
-              <a:t xml:space="preserve">     : </a:t>
+              <a:t>     : </a:t>
             </a:r>
             <a:r>
               <a:rPr dirty="0" err="1"/>
@@ -429,7 +429,7 @@
             </a:r>
             <a:r>
               <a:rPr dirty="0"/>
-              <a:t xml:space="preserve"> neve</a:t>
+              <a:t> neve</a:t>
             </a:r>
           </a:p>
           <a:p>
@@ -439,7 +439,7 @@
             </a:r>
             <a:r>
               <a:rPr dirty="0"/>
-              <a:t xml:space="preserve">       : </a:t>
+              <a:t>       : </a:t>
             </a:r>
             <a:r>
               <a:rPr dirty="0" err="1"/>
@@ -447,7 +447,7 @@
             </a:r>
             <a:r>
               <a:rPr dirty="0"/>
-              <a:t xml:space="preserve"> (ÉÉÉÉ.HH.NN. </a:t>
+              <a:t> (ÉÉÉÉ.HH.NN. </a:t>
             </a:r>
             <a:r>
               <a:rPr dirty="0" err="1"/>
@@ -465,7 +465,7 @@
             </a:r>
             <a:r>
               <a:rPr dirty="0"/>
-              <a:t xml:space="preserve">    : </a:t>
+              <a:t>    : </a:t>
             </a:r>
             <a:r>
               <a:rPr dirty="0" err="1"/>
@@ -473,7 +473,7 @@
             </a:r>
             <a:r>
               <a:rPr dirty="0"/>
-              <a:t xml:space="preserve"> </a:t>
+              <a:t> </a:t>
             </a:r>
             <a:r>
               <a:rPr dirty="0" err="1"/>
@@ -481,7 +481,7 @@
             </a:r>
             <a:r>
               <a:rPr dirty="0"/>
-              <a:t xml:space="preserve"> – NE </a:t>
+              <a:t> – NE </a:t>
             </a:r>
             <a:r>
               <a:rPr dirty="0" err="1"/>
@@ -499,7 +499,7 @@
             </a:r>
             <a:r>
               <a:rPr dirty="0"/>
-              <a:t xml:space="preserve">        : </a:t>
+              <a:t>        : </a:t>
             </a:r>
             <a:r>
               <a:rPr dirty="0" err="1"/>
@@ -507,7 +507,7 @@
             </a:r>
             <a:r>
               <a:rPr dirty="0"/>
-              <a:t xml:space="preserve"> </a:t>
+              <a:t> </a:t>
             </a:r>
             <a:r>
               <a:rPr dirty="0" err="1"/>
@@ -515,7 +515,7 @@
             </a:r>
             <a:r>
               <a:rPr dirty="0"/>
-              <a:t xml:space="preserve"> </a:t>
+              <a:t> </a:t>
             </a:r>
             <a:r>
               <a:rPr dirty="0" err="1"/>
@@ -523,7 +523,7 @@
             </a:r>
             <a:r>
               <a:rPr dirty="0"/>
-              <a:t xml:space="preserve"> </a:t>
+              <a:t> </a:t>
             </a:r>
             <a:r>
               <a:rPr dirty="0" err="1"/>
@@ -531,7 +531,7 @@
             </a:r>
             <a:r>
               <a:rPr dirty="0"/>
-              <a:t xml:space="preserve"> </a:t>
+              <a:t> </a:t>
             </a:r>
             <a:r>
               <a:rPr dirty="0" err="1"/>
@@ -549,7 +549,7 @@
             </a:r>
             <a:r>
               <a:rPr dirty="0"/>
-              <a:t xml:space="preserve"> </a:t>
+              <a:t> </a:t>
             </a:r>
             <a:r>
               <a:rPr dirty="0" err="1"/>
@@ -557,7 +557,7 @@
             </a:r>
             <a:r>
               <a:rPr dirty="0"/>
-              <a:t xml:space="preserve"> </a:t>
+              <a:t> </a:t>
             </a:r>
             <a:r>
               <a:rPr dirty="0" err="1"/>
@@ -571,7 +571,7 @@
           <a:p>
             <a:r>
               <a:rPr dirty="0"/>
-              <a:t xml:space="preserve">  '</a:t>
+              <a:t>  '</a:t>
             </a:r>
             <a:r>
               <a:rPr dirty="0" err="1"/>
@@ -579,7 +579,7 @@
             </a:r>
             <a:r>
               <a:rPr dirty="0"/>
-              <a:t xml:space="preserve"> le a </a:t>
+              <a:t> le a </a:t>
             </a:r>
             <a:r>
               <a:rPr dirty="0" err="1"/>
@@ -587,7 +587,7 @@
             </a:r>
             <a:r>
               <a:rPr dirty="0"/>
-              <a:t xml:space="preserve"> </a:t>
+              <a:t> </a:t>
             </a:r>
             <a:r>
               <a:rPr dirty="0" err="1"/>
@@ -595,7 +595,7 @@
             </a:r>
             <a:r>
               <a:rPr dirty="0"/>
-              <a:t xml:space="preserve"> </a:t>
+              <a:t> </a:t>
             </a:r>
             <a:r>
               <a:rPr dirty="0" err="1"/>
@@ -609,7 +609,7 @@
           <a:p>
             <a:r>
               <a:rPr dirty="0"/>
-              <a:t xml:space="preserve">  'Az </a:t>
+              <a:t>  'Az </a:t>
             </a:r>
             <a:r>
               <a:rPr dirty="0" err="1"/>
@@ -617,7 +617,7 @@
             </a:r>
             <a:r>
               <a:rPr dirty="0"/>
-              <a:t xml:space="preserve"> </a:t>
+              <a:t> </a:t>
             </a:r>
             <a:r>
               <a:rPr dirty="0" err="1"/>
@@ -625,7 +625,7 @@
             </a:r>
             <a:r>
               <a:rPr dirty="0"/>
-              <a:t xml:space="preserve"> </a:t>
+              <a:t> </a:t>
             </a:r>
             <a:r>
               <a:rPr dirty="0" err="1"/>
@@ -633,7 +633,7 @@
             </a:r>
             <a:r>
               <a:rPr dirty="0"/>
-              <a:t xml:space="preserve"> be: ...'</a:t>
+              <a:t> be: ...'</a:t>
             </a:r>
           </a:p>
         </p:txBody>
@@ -718,12 +718,12 @@
           </a:p>
           <a:p>
             <a:r>
-              <a:t xml:space="preserve">content_body  : felsorolás (Calibri 13.5pt); </a:t>
-            </a:r>
-          </a:p>
-          <a:p>
-            <a:r>
-              <a:t xml:space="preserve">                módosítás: paragraphs[i].runs[1].text = 'új szöveg'</a:t>
+              <a:t>content_body  : felsorolás (Calibri 13.5pt); </a:t>
+            </a:r>
+          </a:p>
+          <a:p>
+            <a:r>
+              <a:t>                módosítás: paragraphs[i].runs[1].text = 'új szöveg'</a:t>
             </a:r>
           </a:p>
           <a:p>
@@ -756,12 +756,12 @@
           </a:p>
           <a:p>
             <a:r>
-              <a:t xml:space="preserve">  'A slide_title szövegét cseréld erre: ...'</a:t>
-            </a:r>
-          </a:p>
-          <a:p>
-            <a:r>
-              <a:t xml:space="preserve">  'A content_body 3. bulletjét írd át: ...'</a:t>
+              <a:t>  'A slide_title szövegét cseréld erre: ...'</a:t>
+            </a:r>
+          </a:p>
+          <a:p>
+            <a:r>
+              <a:t>  'A content_body 3. bulletjét írd át: ...'</a:t>
             </a:r>
           </a:p>
         </p:txBody>
@@ -846,12 +846,12 @@
           </a:p>
           <a:p>
             <a:r>
-              <a:t xml:space="preserve">content_body  : felsorolás (Calibri 13.5pt); </a:t>
-            </a:r>
-          </a:p>
-          <a:p>
-            <a:r>
-              <a:t xml:space="preserve">                módosítás: paragraphs[i].runs[1].text = 'új szöveg'</a:t>
+              <a:t>content_body  : felsorolás (Calibri 13.5pt); </a:t>
+            </a:r>
+          </a:p>
+          <a:p>
+            <a:r>
+              <a:t>                módosítás: paragraphs[i].runs[1].text = 'új szöveg'</a:t>
             </a:r>
           </a:p>
           <a:p>
@@ -884,12 +884,12 @@
           </a:p>
           <a:p>
             <a:r>
-              <a:t xml:space="preserve">  'A slide_title szövegét cseréld erre: ...'</a:t>
-            </a:r>
-          </a:p>
-          <a:p>
-            <a:r>
-              <a:t xml:space="preserve">  'A content_body 3. bulletjét írd át: ...'</a:t>
+              <a:t>  'A slide_title szövegét cseréld erre: ...'</a:t>
+            </a:r>
+          </a:p>
+          <a:p>
+            <a:r>
+              <a:t>  'A content_body 3. bulletjét írd át: ...'</a:t>
             </a:r>
           </a:p>
         </p:txBody>
@@ -974,12 +974,12 @@
           </a:p>
           <a:p>
             <a:r>
-              <a:t xml:space="preserve">content_body  : felsorolás (Calibri 13.5pt); </a:t>
-            </a:r>
-          </a:p>
-          <a:p>
-            <a:r>
-              <a:t xml:space="preserve">                módosítás: paragraphs[i].runs[1].text = 'új szöveg'</a:t>
+              <a:t>content_body  : felsorolás (Calibri 13.5pt); </a:t>
+            </a:r>
+          </a:p>
+          <a:p>
+            <a:r>
+              <a:t>                módosítás: paragraphs[i].runs[1].text = 'új szöveg'</a:t>
             </a:r>
           </a:p>
           <a:p>
@@ -1012,12 +1012,12 @@
           </a:p>
           <a:p>
             <a:r>
-              <a:t xml:space="preserve">  'A slide_title szövegét cseréld erre: ...'</a:t>
-            </a:r>
-          </a:p>
-          <a:p>
-            <a:r>
-              <a:t xml:space="preserve">  'A content_body 3. bulletjét írd át: ...'</a:t>
+              <a:t>  'A slide_title szövegét cseréld erre: ...'</a:t>
+            </a:r>
+          </a:p>
+          <a:p>
+            <a:r>
+              <a:t>  'A content_body 3. bulletjét írd át: ...'</a:t>
             </a:r>
           </a:p>
         </p:txBody>
@@ -1120,12 +1120,12 @@
           </a:p>
           <a:p>
             <a:r>
-              <a:t xml:space="preserve">content_body  : felsorolás (Calibri 13.5pt); </a:t>
-            </a:r>
-          </a:p>
-          <a:p>
-            <a:r>
-              <a:t xml:space="preserve">                módosítás: paragraphs[i].runs[1].text = 'új szöveg'</a:t>
+              <a:t>content_body  : felsorolás (Calibri 13.5pt); </a:t>
+            </a:r>
+          </a:p>
+          <a:p>
+            <a:r>
+              <a:t>                módosítás: paragraphs[i].runs[1].text = 'új szöveg'</a:t>
             </a:r>
           </a:p>
           <a:p>
@@ -1158,12 +1158,12 @@
           </a:p>
           <a:p>
             <a:r>
-              <a:t xml:space="preserve">  'A slide_title szövegét cseréld erre: ...'</a:t>
-            </a:r>
-          </a:p>
-          <a:p>
-            <a:r>
-              <a:t xml:space="preserve">  'A content_body 3. bulletjét írd át: ...'</a:t>
+              <a:t>  'A slide_title szövegét cseréld erre: ...'</a:t>
+            </a:r>
+          </a:p>
+          <a:p>
+            <a:r>
+              <a:t>  'A content_body 3. bulletjét írd át: ...'</a:t>
             </a:r>
           </a:p>
         </p:txBody>
@@ -1263,7 +1263,7 @@
           <a:p>
             <a:r>
               <a:rPr dirty="0"/>
-              <a:t xml:space="preserve">SZAKASZFEJLÉC DIA – </a:t>
+              <a:t>SZAKASZFEJLÉC DIA – </a:t>
             </a:r>
             <a:r>
               <a:rPr dirty="0" err="1"/>
@@ -1271,7 +1271,7 @@
             </a:r>
             <a:r>
               <a:rPr dirty="0"/>
-              <a:t xml:space="preserve"> </a:t>
+              <a:t> </a:t>
             </a:r>
             <a:r>
               <a:rPr dirty="0" err="1"/>
@@ -1292,7 +1292,7 @@
             </a:r>
             <a:r>
               <a:rPr dirty="0"/>
-              <a:t xml:space="preserve">      : </a:t>
+              <a:t>      : </a:t>
             </a:r>
             <a:r>
               <a:rPr dirty="0" err="1"/>
@@ -1300,7 +1300,7 @@
             </a:r>
             <a:r>
               <a:rPr dirty="0"/>
-              <a:t xml:space="preserve"> </a:t>
+              <a:t> </a:t>
             </a:r>
             <a:r>
               <a:rPr dirty="0" err="1"/>
@@ -1308,7 +1308,7 @@
             </a:r>
             <a:r>
               <a:rPr dirty="0"/>
-              <a:t xml:space="preserve"> (pl. '03') – Garamond 72pt</a:t>
+              <a:t> (pl. '03') – Garamond 72pt</a:t>
             </a:r>
           </a:p>
           <a:p>
@@ -1318,7 +1318,7 @@
             </a:r>
             <a:r>
               <a:rPr dirty="0"/>
-              <a:t xml:space="preserve">       : </a:t>
+              <a:t>       : </a:t>
             </a:r>
             <a:r>
               <a:rPr dirty="0" err="1"/>
@@ -1326,7 +1326,7 @@
             </a:r>
             <a:r>
               <a:rPr dirty="0"/>
-              <a:t xml:space="preserve"> neve (max 2 </a:t>
+              <a:t> neve (max 2 </a:t>
             </a:r>
             <a:r>
               <a:rPr dirty="0" err="1"/>
@@ -1334,7 +1334,7 @@
             </a:r>
             <a:r>
               <a:rPr dirty="0"/>
-              <a:t xml:space="preserve">, Garamond 24pt </a:t>
+              <a:t>, Garamond 24pt </a:t>
             </a:r>
             <a:r>
               <a:rPr dirty="0" err="1"/>
@@ -1352,7 +1352,7 @@
             </a:r>
             <a:r>
               <a:rPr dirty="0"/>
-              <a:t xml:space="preserve"> : </a:t>
+              <a:t> : </a:t>
             </a:r>
             <a:r>
               <a:rPr dirty="0" err="1"/>
@@ -1360,7 +1360,7 @@
             </a:r>
             <a:r>
               <a:rPr dirty="0"/>
-              <a:t xml:space="preserve"> </a:t>
+              <a:t> </a:t>
             </a:r>
             <a:r>
               <a:rPr dirty="0" err="1"/>
@@ -1368,7 +1368,7 @@
             </a:r>
             <a:r>
               <a:rPr dirty="0"/>
-              <a:t xml:space="preserve"> </a:t>
+              <a:t> </a:t>
             </a:r>
             <a:r>
               <a:rPr dirty="0" err="1"/>
@@ -1376,7 +1376,7 @@
             </a:r>
             <a:r>
               <a:rPr dirty="0"/>
-              <a:t xml:space="preserve"> </a:t>
+              <a:t> </a:t>
             </a:r>
             <a:r>
               <a:rPr dirty="0" err="1"/>
@@ -1384,7 +1384,7 @@
             </a:r>
             <a:r>
               <a:rPr dirty="0"/>
-              <a:t xml:space="preserve"> (Calibri 16pt)</a:t>
+              <a:t> (Calibri 16pt)</a:t>
             </a:r>
           </a:p>
           <a:p>
@@ -1394,7 +1394,7 @@
             </a:r>
             <a:r>
               <a:rPr dirty="0"/>
-              <a:t xml:space="preserve">       : </a:t>
+              <a:t>       : </a:t>
             </a:r>
             <a:r>
               <a:rPr dirty="0" err="1"/>
@@ -1402,7 +1402,7 @@
             </a:r>
             <a:r>
               <a:rPr dirty="0"/>
-              <a:t xml:space="preserve"> </a:t>
+              <a:t> </a:t>
             </a:r>
             <a:r>
               <a:rPr dirty="0" err="1"/>
@@ -1410,7 +1410,7 @@
             </a:r>
             <a:r>
               <a:rPr dirty="0"/>
-              <a:t xml:space="preserve"> </a:t>
+              <a:t> </a:t>
             </a:r>
             <a:r>
               <a:rPr dirty="0" err="1"/>
@@ -1418,7 +1418,7 @@
             </a:r>
             <a:r>
               <a:rPr dirty="0"/>
-              <a:t xml:space="preserve"> – NE </a:t>
+              <a:t> – NE </a:t>
             </a:r>
             <a:r>
               <a:rPr dirty="0" err="1"/>
@@ -1433,7 +1433,7 @@
             </a:r>
             <a:r>
               <a:rPr dirty="0"/>
-              <a:t xml:space="preserve">     : navy </a:t>
+              <a:t>     : navy </a:t>
             </a:r>
             <a:r>
               <a:rPr dirty="0" err="1"/>
@@ -1441,7 +1441,7 @@
             </a:r>
             <a:r>
               <a:rPr dirty="0"/>
-              <a:t xml:space="preserve"> </a:t>
+              <a:t> </a:t>
             </a:r>
             <a:r>
               <a:rPr dirty="0" err="1"/>
@@ -1449,7 +1449,7 @@
             </a:r>
             <a:r>
               <a:rPr dirty="0"/>
-              <a:t xml:space="preserve"> – NE </a:t>
+              <a:t> – NE </a:t>
             </a:r>
             <a:r>
               <a:rPr dirty="0" err="1"/>
@@ -1467,7 +1467,7 @@
             </a:r>
             <a:r>
               <a:rPr dirty="0"/>
-              <a:t xml:space="preserve"> </a:t>
+              <a:t> </a:t>
             </a:r>
             <a:r>
               <a:rPr dirty="0" err="1"/>
@@ -1481,7 +1481,7 @@
           <a:p>
             <a:r>
               <a:rPr dirty="0"/>
-              <a:t xml:space="preserve">  'A </a:t>
+              <a:t>  'A </a:t>
             </a:r>
             <a:r>
               <a:rPr dirty="0" err="1"/>
@@ -1489,7 +1489,7 @@
             </a:r>
             <a:r>
               <a:rPr dirty="0"/>
-              <a:t xml:space="preserve"> </a:t>
+              <a:t> </a:t>
             </a:r>
             <a:r>
               <a:rPr dirty="0" err="1"/>
@@ -1497,7 +1497,7 @@
             </a:r>
             <a:r>
               <a:rPr dirty="0"/>
-              <a:t xml:space="preserve"> </a:t>
+              <a:t> </a:t>
             </a:r>
             <a:r>
               <a:rPr dirty="0" err="1"/>
@@ -1511,7 +1511,7 @@
           <a:p>
             <a:r>
               <a:rPr dirty="0"/>
-              <a:t xml:space="preserve">  'A </a:t>
+              <a:t>  'A </a:t>
             </a:r>
             <a:r>
               <a:rPr dirty="0" err="1"/>
@@ -1519,7 +1519,7 @@
             </a:r>
             <a:r>
               <a:rPr dirty="0"/>
-              <a:t xml:space="preserve"> </a:t>
+              <a:t> </a:t>
             </a:r>
             <a:r>
               <a:rPr dirty="0" err="1"/>
@@ -1527,7 +1527,7 @@
             </a:r>
             <a:r>
               <a:rPr dirty="0"/>
-              <a:t xml:space="preserve"> </a:t>
+              <a:t> </a:t>
             </a:r>
             <a:r>
               <a:rPr dirty="0" err="1"/>
@@ -1631,12 +1631,12 @@
           </a:p>
           <a:p>
             <a:r>
-              <a:t xml:space="preserve">content_body  : felsorolás (Calibri 13.5pt); </a:t>
-            </a:r>
-          </a:p>
-          <a:p>
-            <a:r>
-              <a:t xml:space="preserve">                módosítás: paragraphs[i].runs[1].text = 'új szöveg'</a:t>
+              <a:t>content_body  : felsorolás (Calibri 13.5pt); </a:t>
+            </a:r>
+          </a:p>
+          <a:p>
+            <a:r>
+              <a:t>                módosítás: paragraphs[i].runs[1].text = 'új szöveg'</a:t>
             </a:r>
           </a:p>
           <a:p>
@@ -1669,12 +1669,12 @@
           </a:p>
           <a:p>
             <a:r>
-              <a:t xml:space="preserve">  'A slide_title szövegét cseréld erre: ...'</a:t>
-            </a:r>
-          </a:p>
-          <a:p>
-            <a:r>
-              <a:t xml:space="preserve">  'A content_body 3. bulletjét írd át: ...'</a:t>
+              <a:t>  'A slide_title szövegét cseréld erre: ...'</a:t>
+            </a:r>
+          </a:p>
+          <a:p>
+            <a:r>
+              <a:t>  'A content_body 3. bulletjét írd át: ...'</a:t>
             </a:r>
           </a:p>
         </p:txBody>
@@ -1777,12 +1777,12 @@
           </a:p>
           <a:p>
             <a:r>
-              <a:t xml:space="preserve">content_body  : felsorolás (Calibri 13.5pt); </a:t>
-            </a:r>
-          </a:p>
-          <a:p>
-            <a:r>
-              <a:t xml:space="preserve">                módosítás: paragraphs[i].runs[1].text = 'új szöveg'</a:t>
+              <a:t>content_body  : felsorolás (Calibri 13.5pt); </a:t>
+            </a:r>
+          </a:p>
+          <a:p>
+            <a:r>
+              <a:t>                módosítás: paragraphs[i].runs[1].text = 'új szöveg'</a:t>
             </a:r>
           </a:p>
           <a:p>
@@ -1815,12 +1815,12 @@
           </a:p>
           <a:p>
             <a:r>
-              <a:t xml:space="preserve">  'A slide_title szövegét cseréld erre: ...'</a:t>
-            </a:r>
-          </a:p>
-          <a:p>
-            <a:r>
-              <a:t xml:space="preserve">  'A content_body 3. bulletjét írd át: ...'</a:t>
+              <a:t>  'A slide_title szövegét cseréld erre: ...'</a:t>
+            </a:r>
+          </a:p>
+          <a:p>
+            <a:r>
+              <a:t>  'A content_body 3. bulletjét írd át: ...'</a:t>
             </a:r>
           </a:p>
         </p:txBody>
@@ -1934,12 +1934,12 @@
           </a:p>
           <a:p>
             <a:r>
-              <a:t xml:space="preserve">content_body  : felsorolás (Calibri 13.5pt); </a:t>
-            </a:r>
-          </a:p>
-          <a:p>
-            <a:r>
-              <a:t xml:space="preserve">                módosítás: paragraphs[i].runs[1].text = 'új szöveg'</a:t>
+              <a:t>content_body  : felsorolás (Calibri 13.5pt); </a:t>
+            </a:r>
+          </a:p>
+          <a:p>
+            <a:r>
+              <a:t>                módosítás: paragraphs[i].runs[1].text = 'új szöveg'</a:t>
             </a:r>
           </a:p>
           <a:p>
@@ -1972,12 +1972,12 @@
           </a:p>
           <a:p>
             <a:r>
-              <a:t xml:space="preserve">  'A slide_title szövegét cseréld erre: ...'</a:t>
-            </a:r>
-          </a:p>
-          <a:p>
-            <a:r>
-              <a:t xml:space="preserve">  'A content_body 3. bulletjét írd át: ...'</a:t>
+              <a:t>  'A slide_title szövegét cseréld erre: ...'</a:t>
+            </a:r>
+          </a:p>
+          <a:p>
+            <a:r>
+              <a:t>  'A content_body 3. bulletjét írd át: ...'</a:t>
             </a:r>
           </a:p>
         </p:txBody>
@@ -2500,12 +2500,12 @@
           </a:p>
           <a:p>
             <a:r>
-              <a:t xml:space="preserve">                   l=ML=12mm, t=CT≈36mm, w=CW≈309mm, h≈133mm</a:t>
-            </a:r>
-          </a:p>
-          <a:p>
-            <a:r>
-              <a:t xml:space="preserve">                   Cseréld: töröld a placeholder-t, add add_picture()</a:t>
+              <a:t>                   l=ML=12mm, t=CT≈36mm, w=CW≈309mm, h≈133mm</a:t>
+            </a:r>
+          </a:p>
+          <a:p>
+            <a:r>
+              <a:t>                   Cseréld: töröld a placeholder-t, add add_picture()</a:t>
             </a:r>
           </a:p>
           <a:p>
@@ -2515,12 +2515,12 @@
           </a:p>
           <a:p>
             <a:r>
-              <a:t xml:space="preserve">                   runs[0].text = '1. ábra: '</a:t>
-            </a:r>
-          </a:p>
-          <a:p>
-            <a:r>
-              <a:t xml:space="preserve">                   runs[1].text = 'a felirat szövege'</a:t>
+              <a:t>                   runs[0].text = '1. ábra: '</a:t>
+            </a:r>
+          </a:p>
+          <a:p>
+            <a:r>
+              <a:t>                   runs[1].text = 'a felirat szövege'</a:t>
             </a:r>
           </a:p>
           <a:p>
@@ -2623,12 +2623,12 @@
           </a:p>
           <a:p>
             <a:r>
-              <a:t xml:space="preserve">                        runs[0].text = '1. táblázat: '</a:t>
-            </a:r>
-          </a:p>
-          <a:p>
-            <a:r>
-              <a:t xml:space="preserve">                        runs[1].text = 'a felirat szövege'</a:t>
+              <a:t>                        runs[0].text = '1. táblázat: '</a:t>
+            </a:r>
+          </a:p>
+          <a:p>
+            <a:r>
+              <a:t>                        runs[1].text = 'a felirat szövege'</a:t>
             </a:r>
           </a:p>
           <a:p>
@@ -2643,12 +2643,12 @@
           </a:p>
           <a:p>
             <a:r>
-              <a:t xml:space="preserve">                        cella elérése: table.cell(sor, oszlop).text = ...</a:t>
-            </a:r>
-          </a:p>
-          <a:p>
-            <a:r>
-              <a:t xml:space="preserve">                        fejléc: sor=0, adatok: sor=1..(ROWS-1)</a:t>
+              <a:t>                        cella elérése: table.cell(sor, oszlop).text = ...</a:t>
+            </a:r>
+          </a:p>
+          <a:p>
+            <a:r>
+              <a:t>                        fejléc: sor=0, adatok: sor=1..(ROWS-1)</a:t>
             </a:r>
           </a:p>
           <a:p>
@@ -2661,17 +2661,17 @@
           </a:p>
           <a:p>
             <a:r>
-              <a:t xml:space="preserve">  Sorokat a python-pptx nem tud dinamikusan hozzáadni –</a:t>
-            </a:r>
-          </a:p>
-          <a:p>
-            <a:r>
-              <a:t xml:space="preserve">  a táblát törölve és újra létrehozva kell generálni.</a:t>
-            </a:r>
-          </a:p>
-          <a:p>
-            <a:r>
-              <a:t xml:space="preserve">  Cowork szkript: 'Hozz létre új táblázat diát N sorral és M oszloppal.'</a:t>
+              <a:t>  Sorokat a python-pptx nem tud dinamikusan hozzáadni –</a:t>
+            </a:r>
+          </a:p>
+          <a:p>
+            <a:r>
+              <a:t>  a táblát törölve és újra létrehozva kell generálni.</a:t>
+            </a:r>
+          </a:p>
+          <a:p>
+            <a:r>
+              <a:t>  Cowork szkript: 'Hozz létre új táblázat diát N sorral és M oszloppal.'</a:t>
             </a:r>
           </a:p>
         </p:txBody>
@@ -2875,7 +2875,7 @@
           <a:p>
             <a:fld id="{5BCAD085-E8A6-8845-BD4E-CB4CCA059FC4}" type="datetimeFigureOut">
               <a:rPr lang="en-US" smtClean="0"/>
-              <a:t>5/29/2026</a:t>
+              <a:t>6/3/2026</a:t>
             </a:fld>
             <a:endParaRPr lang="en-US"/>
           </a:p>
@@ -3043,7 +3043,7 @@
           <a:p>
             <a:fld id="{5BCAD085-E8A6-8845-BD4E-CB4CCA059FC4}" type="datetimeFigureOut">
               <a:rPr lang="en-US" smtClean="0"/>
-              <a:t>5/29/2026</a:t>
+              <a:t>6/3/2026</a:t>
             </a:fld>
             <a:endParaRPr lang="en-US"/>
           </a:p>
@@ -3221,7 +3221,7 @@
           <a:p>
             <a:fld id="{5BCAD085-E8A6-8845-BD4E-CB4CCA059FC4}" type="datetimeFigureOut">
               <a:rPr lang="en-US" smtClean="0"/>
-              <a:t>5/29/2026</a:t>
+              <a:t>6/3/2026</a:t>
             </a:fld>
             <a:endParaRPr lang="en-US"/>
           </a:p>
@@ -3352,7 +3352,7 @@
           <p:nvPr/>
         </p:nvPicPr>
         <p:blipFill>
-          <a:blip r:embed="rId1"/>
+          <a:blip r:embed="rId2"/>
           <a:stretch/>
         </p:blipFill>
         <p:spPr>
@@ -3515,7 +3515,7 @@
           <a:p>
             <a:fld id="{5BCAD085-E8A6-8845-BD4E-CB4CCA059FC4}" type="datetimeFigureOut">
               <a:rPr lang="en-US" smtClean="0"/>
-              <a:t>5/29/2026</a:t>
+              <a:t>6/3/2026</a:t>
             </a:fld>
             <a:endParaRPr lang="en-US"/>
           </a:p>
@@ -3760,7 +3760,7 @@
           <a:p>
             <a:fld id="{5BCAD085-E8A6-8845-BD4E-CB4CCA059FC4}" type="datetimeFigureOut">
               <a:rPr lang="en-US" smtClean="0"/>
-              <a:t>5/29/2026</a:t>
+              <a:t>6/3/2026</a:t>
             </a:fld>
             <a:endParaRPr lang="en-US"/>
           </a:p>
@@ -4045,7 +4045,7 @@
           <a:p>
             <a:fld id="{5BCAD085-E8A6-8845-BD4E-CB4CCA059FC4}" type="datetimeFigureOut">
               <a:rPr lang="en-US" smtClean="0"/>
-              <a:t>5/29/2026</a:t>
+              <a:t>6/3/2026</a:t>
             </a:fld>
             <a:endParaRPr lang="en-US"/>
           </a:p>
@@ -4464,7 +4464,7 @@
           <a:p>
             <a:fld id="{5BCAD085-E8A6-8845-BD4E-CB4CCA059FC4}" type="datetimeFigureOut">
               <a:rPr lang="en-US" smtClean="0"/>
-              <a:t>5/29/2026</a:t>
+              <a:t>6/3/2026</a:t>
             </a:fld>
             <a:endParaRPr lang="en-US"/>
           </a:p>
@@ -4581,7 +4581,7 @@
           <a:p>
             <a:fld id="{5BCAD085-E8A6-8845-BD4E-CB4CCA059FC4}" type="datetimeFigureOut">
               <a:rPr lang="en-US" smtClean="0"/>
-              <a:t>5/29/2026</a:t>
+              <a:t>6/3/2026</a:t>
             </a:fld>
             <a:endParaRPr lang="en-US"/>
           </a:p>
@@ -4676,7 +4676,7 @@
           <a:p>
             <a:fld id="{5BCAD085-E8A6-8845-BD4E-CB4CCA059FC4}" type="datetimeFigureOut">
               <a:rPr lang="en-US" smtClean="0"/>
-              <a:t>5/29/2026</a:t>
+              <a:t>6/3/2026</a:t>
             </a:fld>
             <a:endParaRPr lang="en-US"/>
           </a:p>
@@ -4951,7 +4951,7 @@
           <a:p>
             <a:fld id="{5BCAD085-E8A6-8845-BD4E-CB4CCA059FC4}" type="datetimeFigureOut">
               <a:rPr lang="en-US" smtClean="0"/>
-              <a:t>5/29/2026</a:t>
+              <a:t>6/3/2026</a:t>
             </a:fld>
             <a:endParaRPr lang="en-US"/>
           </a:p>
@@ -5203,7 +5203,7 @@
           <a:p>
             <a:fld id="{5BCAD085-E8A6-8845-BD4E-CB4CCA059FC4}" type="datetimeFigureOut">
               <a:rPr lang="en-US" smtClean="0"/>
-              <a:t>5/29/2026</a:t>
+              <a:t>6/3/2026</a:t>
             </a:fld>
             <a:endParaRPr lang="en-US"/>
           </a:p>
@@ -5414,7 +5414,7 @@
           <a:p>
             <a:fld id="{5BCAD085-E8A6-8845-BD4E-CB4CCA059FC4}" type="datetimeFigureOut">
               <a:rPr lang="en-US" smtClean="0"/>
-              <a:t>5/29/2026</a:t>
+              <a:t>6/3/2026</a:t>
             </a:fld>
             <a:endParaRPr lang="en-US"/>
           </a:p>
@@ -5518,7 +5518,7 @@
     <p:sldLayoutId id="2147483729" r:id="rId9"/>
     <p:sldLayoutId id="2147483730" r:id="rId10"/>
     <p:sldLayoutId id="2147483731" r:id="rId11"/>
-    <p:sldLayoutId id="2147483732" r:id="rId13"/>
+    <p:sldLayoutId id="2147483732" r:id="rId12"/>
   </p:sldLayoutIdLst>
   <p:txStyles>
     <p:titleStyle>
@@ -5943,7 +5943,7 @@
                 </a:solidFill>
                 <a:latin typeface="Garamond"/>
               </a:rPr>
-              <a:t xml:space="preserve"> </a:t>
+              <a:t> </a:t>
             </a:r>
             <a:r>
               <a:rPr sz="3400" b="1" i="0" dirty="0" err="1">
@@ -5961,7 +5961,7 @@
                 </a:solidFill>
                 <a:latin typeface="Garamond"/>
               </a:rPr>
-              <a:t xml:space="preserve">:
+              <a:t>:
 Lorem ipsum dolor sit </a:t>
             </a:r>
             <a:r>
@@ -5980,7 +5980,7 @@
                 </a:solidFill>
                 <a:latin typeface="Garamond"/>
               </a:rPr>
-              <a:t xml:space="preserve"> </a:t>
+              <a:t> </a:t>
             </a:r>
             <a:r>
               <a:rPr sz="3400" b="1" i="0" dirty="0" err="1">
@@ -6064,7 +6064,7 @@
                 </a:solidFill>
                 <a:latin typeface="Aptos" panose="020B0004020202020204" pitchFamily="34" charset="0"/>
               </a:rPr>
-              <a:t xml:space="preserve">Egyetem neve – Képzés neve </a:t>
+              <a:t>Egyetem neve – Képzés neve </a:t>
             </a:r>
             <a:r>
               <a:rPr sz="1600" b="0" i="1" dirty="0">
@@ -6073,7 +6073,7 @@
                 </a:solidFill>
                 <a:latin typeface="Aptos" panose="020B0004020202020204" pitchFamily="34" charset="0"/>
               </a:rPr>
-              <a:t xml:space="preserve">– </a:t>
+              <a:t>– </a:t>
             </a:r>
             <a:r>
               <a:rPr sz="1600" b="0" i="1" dirty="0" err="1">
@@ -6091,7 +6091,7 @@
                 </a:solidFill>
                 <a:latin typeface="Aptos" panose="020B0004020202020204" pitchFamily="34" charset="0"/>
               </a:rPr>
-              <a:t xml:space="preserve"> neve</a:t>
+              <a:t> neve</a:t>
             </a:r>
             <a:r>
               <a:rPr lang="hu-HU" sz="1600" i="1" dirty="0">
@@ -6100,7 +6100,7 @@
                 </a:solidFill>
                 <a:latin typeface="Aptos" panose="020B0004020202020204" pitchFamily="34" charset="0"/>
               </a:rPr>
-              <a:t xml:space="preserve">  –  Tantárgy neve</a:t>
+              <a:t>  –  Tantárgy neve</a:t>
             </a:r>
             <a:endParaRPr sz="1600" b="0" i="1" dirty="0">
               <a:solidFill>
@@ -6135,14 +6135,20 @@
           <a:p>
             <a:pPr algn="l"/>
             <a:r>
-              <a:rPr sz="1300" b="0" i="0">
+              <a:rPr lang="hu-HU" sz="1300" b="0" i="0" dirty="0">
                 <a:solidFill>
                   <a:srgbClr val="7A8A9E"/>
                 </a:solidFill>
                 <a:latin typeface="Aptos" panose="020B0004020202020204" pitchFamily="34" charset="0"/>
               </a:rPr>
-              <a:t>Dr. Hári László</a:t>
-            </a:r>
+              <a:t>Előadó neve</a:t>
+            </a:r>
+            <a:endParaRPr sz="1300" b="0" i="0" dirty="0">
+              <a:solidFill>
+                <a:srgbClr val="7A8A9E"/>
+              </a:solidFill>
+              <a:latin typeface="Aptos" panose="020B0004020202020204" pitchFamily="34" charset="0"/>
+            </a:endParaRPr>
           </a:p>
         </p:txBody>
       </p:sp>
@@ -6397,7 +6403,7 @@
                 </a:solidFill>
                 <a:latin typeface="Aptos"/>
               </a:rPr>
-              <a:t xml:space="preserve">	Szerző, A. (2023). A cím. Kiadó, Város.</a:t>
+              <a:t>	Szerző, A. (2023). A cím. Kiadó, Város.</a:t>
             </a:r>
           </a:p>
           <a:p>
@@ -6425,7 +6431,7 @@
                 </a:solidFill>
                 <a:latin typeface="Aptos"/>
               </a:rPr>
-              <a:t xml:space="preserve">	Szerző, B. – Szerző, C. (2022). Cím. Folyóirat neve, 10(2), 45–67.</a:t>
+              <a:t>	Szerző, B. – Szerző, C. (2022). Cím. Folyóirat neve, 10(2), 45–67.</a:t>
             </a:r>
           </a:p>
           <a:p>
@@ -6453,7 +6459,7 @@
                 </a:solidFill>
                 <a:latin typeface="Aptos"/>
               </a:rPr>
-              <a:t xml:space="preserve">	Szerző, D. (2021). Fejezet címe. In: Szerkesztő (szerk.), Könyv. Kiadó.</a:t>
+              <a:t>	Szerző, D. (2021). Fejezet címe. In: Szerkesztő (szerk.), Könyv. Kiadó.</a:t>
             </a:r>
           </a:p>
           <a:p>
@@ -6481,7 +6487,7 @@
                 </a:solidFill>
                 <a:latin typeface="Aptos"/>
               </a:rPr>
-              <a:t xml:space="preserve">	Szerző, E. (2020). Weboldal neve. URL: https://example.com [Letöltve: 2024]</a:t>
+              <a:t>	Szerző, E. (2020). Weboldal neve. URL: https://example.com [Letöltve: 2024]</a:t>
             </a:r>
           </a:p>
           <a:p>
@@ -6509,7 +6515,7 @@
                 </a:solidFill>
                 <a:latin typeface="Aptos"/>
               </a:rPr>
-              <a:t xml:space="preserve">	Szerző, F. (2019). Konferencia-előadás. In: Konferencia neve, 123–130.</a:t>
+              <a:t>	Szerző, F. (2019). Konferencia-előadás. In: Konferencia neve, 123–130.</a:t>
             </a:r>
           </a:p>
           <a:p>
@@ -6943,7 +6949,7 @@
                 </a:solidFill>
                 <a:latin typeface="Aptos"/>
               </a:rPr>
-              <a:t xml:space="preserve">	2026-05-24	Claude	</a:t>
+              <a:t>	2026-05-24	Claude	</a:t>
             </a:r>
             <a:r>
               <a:rPr lang="hu-HU" sz="1400" dirty="0" err="1">
@@ -6991,7 +6997,7 @@
                 </a:solidFill>
                 <a:latin typeface="Aptos"/>
               </a:rPr>
-              <a:t xml:space="preserve">	2026-05-24	Hári László	</a:t>
+              <a:t>	2026-05-24	Hári László	</a:t>
             </a:r>
             <a:r>
               <a:rPr lang="hu-HU" sz="1400" dirty="0" err="1">
@@ -7039,7 +7045,7 @@
                 </a:solidFill>
                 <a:latin typeface="Aptos"/>
               </a:rPr>
-              <a:t xml:space="preserve">	2026-05-24	Claude</a:t>
+              <a:t>	2026-05-24	Claude</a:t>
             </a:r>
             <a:r>
               <a:rPr lang="hu-HU" sz="1400">
@@ -7048,7 +7054,7 @@
                 </a:solidFill>
                 <a:latin typeface="Aptos"/>
               </a:rPr>
-              <a:t xml:space="preserve">	Finomítás</a:t>
+              <a:t>	Finomítás</a:t>
             </a:r>
             <a:endParaRPr lang="hu-HU" sz="1400" dirty="0">
               <a:solidFill>
@@ -7316,7 +7322,7 @@
                 </a:solidFill>
                 <a:latin typeface="Aptos" panose="020B0004020202020204" pitchFamily="34" charset="0"/>
               </a:rPr>
-              <a:t xml:space="preserve">1. </a:t>
+              <a:t>1. </a:t>
             </a:r>
             <a:r>
               <a:rPr lang="hu-HU" sz="1600" dirty="0">
@@ -7350,7 +7356,7 @@
                 </a:solidFill>
                 <a:latin typeface="Aptos" panose="020B0004020202020204" pitchFamily="34" charset="0"/>
               </a:rPr>
-              <a:t xml:space="preserve">	1.1. </a:t>
+              <a:t>	1.1. </a:t>
             </a:r>
             <a:r>
               <a:rPr lang="hu-HU" sz="1600" dirty="0">
@@ -7378,7 +7384,7 @@
                 </a:solidFill>
                 <a:latin typeface="Aptos" panose="020B0004020202020204" pitchFamily="34" charset="0"/>
               </a:rPr>
-              <a:t xml:space="preserve">		1.1.1.</a:t>
+              <a:t>		1.1.1.</a:t>
             </a:r>
             <a:r>
               <a:rPr sz="1600" dirty="0">
@@ -7387,7 +7393,7 @@
                 </a:solidFill>
                 <a:latin typeface="Aptos" panose="020B0004020202020204" pitchFamily="34" charset="0"/>
               </a:rPr>
-              <a:t xml:space="preserve">  </a:t>
+              <a:t>  </a:t>
             </a:r>
             <a:r>
               <a:rPr lang="hu-HU" sz="1600" dirty="0">
@@ -7424,7 +7430,7 @@
                 </a:solidFill>
                 <a:latin typeface="Aptos" panose="020B0004020202020204" pitchFamily="34" charset="0"/>
               </a:rPr>
-              <a:t xml:space="preserve">. </a:t>
+              <a:t>. </a:t>
             </a:r>
             <a:r>
               <a:rPr lang="hu-HU" sz="1600" dirty="0">
@@ -7458,7 +7464,7 @@
                 </a:solidFill>
                 <a:latin typeface="Aptos" panose="020B0004020202020204" pitchFamily="34" charset="0"/>
               </a:rPr>
-              <a:t xml:space="preserve">	2</a:t>
+              <a:t>	2</a:t>
             </a:r>
             <a:r>
               <a:rPr lang="es-ES" sz="1600" dirty="0">
@@ -7467,7 +7473,7 @@
                 </a:solidFill>
                 <a:latin typeface="Aptos" panose="020B0004020202020204" pitchFamily="34" charset="0"/>
               </a:rPr>
-              <a:t xml:space="preserve">.1. </a:t>
+              <a:t>.1. </a:t>
             </a:r>
             <a:r>
               <a:rPr lang="hu-HU" sz="1600" dirty="0">
@@ -7501,7 +7507,7 @@
                 </a:solidFill>
                 <a:latin typeface="Aptos" panose="020B0004020202020204" pitchFamily="34" charset="0"/>
               </a:rPr>
-              <a:t xml:space="preserve">		2</a:t>
+              <a:t>		2</a:t>
             </a:r>
             <a:r>
               <a:rPr lang="es-ES" sz="1600" dirty="0">
@@ -7510,7 +7516,7 @@
                 </a:solidFill>
                 <a:latin typeface="Aptos" panose="020B0004020202020204" pitchFamily="34" charset="0"/>
               </a:rPr>
-              <a:t xml:space="preserve">.1.1.  </a:t>
+              <a:t>.1.1.  </a:t>
             </a:r>
             <a:r>
               <a:rPr lang="hu-HU" sz="1600" dirty="0">
@@ -7824,7 +7830,7 @@
                 </a:solidFill>
                 <a:latin typeface="Garamond"/>
               </a:rPr>
-              <a:t xml:space="preserve"> neve –
+              <a:t> neve –
 Lorem ipsum</a:t>
             </a:r>
           </a:p>
@@ -7866,7 +7872,7 @@
                 </a:solidFill>
                 <a:latin typeface="Aptos" panose="020B0004020202020204" pitchFamily="34" charset="0"/>
               </a:rPr>
-              <a:t xml:space="preserve">Ez a </a:t>
+              <a:t>Ez a </a:t>
             </a:r>
             <a:r>
               <a:rPr sz="1600" b="0" i="0" dirty="0" err="1">
@@ -7884,7 +7890,7 @@
                 </a:solidFill>
                 <a:latin typeface="Aptos" panose="020B0004020202020204" pitchFamily="34" charset="0"/>
               </a:rPr>
-              <a:t xml:space="preserve"> </a:t>
+              <a:t> </a:t>
             </a:r>
             <a:r>
               <a:rPr sz="1600" b="0" i="0" dirty="0" err="1">
@@ -7921,7 +7927,7 @@
                 </a:solidFill>
                 <a:latin typeface="Aptos" panose="020B0004020202020204" pitchFamily="34" charset="0"/>
               </a:rPr>
-              <a:t xml:space="preserve"> </a:t>
+              <a:t> </a:t>
             </a:r>
             <a:r>
               <a:rPr sz="1600" b="0" i="0" dirty="0" err="1">
@@ -7939,7 +7945,7 @@
                 </a:solidFill>
                 <a:latin typeface="Aptos" panose="020B0004020202020204" pitchFamily="34" charset="0"/>
               </a:rPr>
-              <a:t xml:space="preserve">.
+              <a:t>.
 Lorem ipsum dolor sit </a:t>
             </a:r>
             <a:r>
@@ -7977,7 +7983,7 @@
                 </a:solidFill>
                 <a:latin typeface="Aptos" panose="020B0004020202020204" pitchFamily="34" charset="0"/>
               </a:rPr>
-              <a:t xml:space="preserve"> </a:t>
+              <a:t> </a:t>
             </a:r>
             <a:r>
               <a:rPr sz="1600" b="0" i="0" dirty="0" err="1">
@@ -7995,7 +8001,7 @@
                 </a:solidFill>
                 <a:latin typeface="Aptos" panose="020B0004020202020204" pitchFamily="34" charset="0"/>
               </a:rPr>
-              <a:t xml:space="preserve"> </a:t>
+              <a:t> </a:t>
             </a:r>
             <a:r>
               <a:rPr sz="1600" b="0" i="0" dirty="0" err="1">
@@ -11783,7 +11789,7 @@
                 </a:solidFill>
                 <a:latin typeface="Aptos" panose="020B0004020202020204" pitchFamily="34" charset="0"/>
               </a:rPr>
-              <a:t xml:space="preserve"> </a:t>
+              <a:t> </a:t>
             </a:r>
             <a:r>
               <a:rPr sz="1600" i="1" dirty="0" err="1">
@@ -11801,7 +11807,7 @@
                 </a:solidFill>
                 <a:latin typeface="Aptos" panose="020B0004020202020204" pitchFamily="34" charset="0"/>
               </a:rPr>
-              <a:t xml:space="preserve"> – </a:t>
+              <a:t> – </a:t>
             </a:r>
             <a:r>
               <a:rPr sz="1600" i="1" dirty="0" err="1">
@@ -11819,7 +11825,7 @@
                 </a:solidFill>
                 <a:latin typeface="Aptos" panose="020B0004020202020204" pitchFamily="34" charset="0"/>
               </a:rPr>
-              <a:t xml:space="preserve"> le </a:t>
+              <a:t> le </a:t>
             </a:r>
             <a:r>
               <a:rPr sz="1600" i="1" dirty="0" err="1">
@@ -11925,7 +11931,7 @@
                 </a:solidFill>
                 <a:latin typeface="Aptos" panose="020B0004020202020204" pitchFamily="34" charset="0"/>
               </a:rPr>
-              <a:t xml:space="preserve">1. ábra: </a:t>
+              <a:t>1. ábra: </a:t>
             </a:r>
             <a:r>
               <a:rPr sz="1600" b="0" i="1">
@@ -12134,7 +12140,7 @@
                 </a:solidFill>
                 <a:latin typeface="Aptos" panose="020B0004020202020204" pitchFamily="34" charset="0"/>
               </a:rPr>
-              <a:t xml:space="preserve">1. táblázat: </a:t>
+              <a:t>1. táblázat: </a:t>
             </a:r>
             <a:r>
               <a:rPr sz="1600" b="0" i="1">
